--- a/submission/preliminary/SalesAgentTeams_初赛方案.pptx
+++ b/submission/preliminary/SalesAgentTeams_初赛方案.pptx
@@ -2,32 +2,32 @@
 <file path=ppt/presentation.xml><?xml version="1.0" encoding="utf-8"?>
 <p:presentation xmlns:p="http://schemas.openxmlformats.org/presentationml/2006/main">
   <p:sldMasterIdLst>
-    <p:sldMasterId xmlns:r="http://schemas.openxmlformats.org/officeDocument/2006/relationships" id="2147483648" r:id="R98f041840bd5478c"/>
-    <p:sldMasterId xmlns:r="http://schemas.openxmlformats.org/officeDocument/2006/relationships" id="2147483650" r:id="R2bcb9db1d06d4817"/>
+    <p:sldMasterId xmlns:r="http://schemas.openxmlformats.org/officeDocument/2006/relationships" id="2147483648" r:id="R634a517694c143ab"/>
+    <p:sldMasterId xmlns:r="http://schemas.openxmlformats.org/officeDocument/2006/relationships" id="2147483650" r:id="Re1bfc4eb72d848c1"/>
   </p:sldMasterIdLst>
   <p:notesMasterIdLst>
-    <p:notesMasterId xmlns:r="http://schemas.openxmlformats.org/officeDocument/2006/relationships" r:id="Rbe8f87abbb3e42dd"/>
+    <p:notesMasterId xmlns:r="http://schemas.openxmlformats.org/officeDocument/2006/relationships" r:id="Rb550f468a6534929"/>
   </p:notesMasterIdLst>
   <p:sldIdLst>
-    <p:sldId xmlns:r="http://schemas.openxmlformats.org/officeDocument/2006/relationships" id="256" r:id="R72c73922db0c4ce1"/>
-    <p:sldId xmlns:r="http://schemas.openxmlformats.org/officeDocument/2006/relationships" id="257" r:id="R987413629ede4a80"/>
-    <p:sldId xmlns:r="http://schemas.openxmlformats.org/officeDocument/2006/relationships" id="258" r:id="Ra469023c504c4e96"/>
-    <p:sldId xmlns:r="http://schemas.openxmlformats.org/officeDocument/2006/relationships" id="259" r:id="R2753b3afb563423c"/>
-    <p:sldId xmlns:r="http://schemas.openxmlformats.org/officeDocument/2006/relationships" id="260" r:id="R4eaea3aba3cc4546"/>
-    <p:sldId xmlns:r="http://schemas.openxmlformats.org/officeDocument/2006/relationships" id="261" r:id="R031978561b9d4a62"/>
-    <p:sldId xmlns:r="http://schemas.openxmlformats.org/officeDocument/2006/relationships" id="262" r:id="R26400f39ad384c1a"/>
-    <p:sldId xmlns:r="http://schemas.openxmlformats.org/officeDocument/2006/relationships" id="263" r:id="R2115650fcf6a450a"/>
-    <p:sldId xmlns:r="http://schemas.openxmlformats.org/officeDocument/2006/relationships" id="264" r:id="R9811c0e0a96b48ad"/>
-    <p:sldId xmlns:r="http://schemas.openxmlformats.org/officeDocument/2006/relationships" id="265" r:id="Rdc19c1cea8a14504"/>
-    <p:sldId xmlns:r="http://schemas.openxmlformats.org/officeDocument/2006/relationships" id="266" r:id="Rad5c03bb60144472"/>
-    <p:sldId xmlns:r="http://schemas.openxmlformats.org/officeDocument/2006/relationships" id="267" r:id="R8d3c99f5fd2e4653"/>
-    <p:sldId xmlns:r="http://schemas.openxmlformats.org/officeDocument/2006/relationships" id="268" r:id="R6966c2683dd54f3c"/>
-    <p:sldId xmlns:r="http://schemas.openxmlformats.org/officeDocument/2006/relationships" id="269" r:id="R32d9ffafdd414816"/>
-    <p:sldId xmlns:r="http://schemas.openxmlformats.org/officeDocument/2006/relationships" id="270" r:id="Ra9440020d4c44f2b"/>
-    <p:sldId xmlns:r="http://schemas.openxmlformats.org/officeDocument/2006/relationships" id="271" r:id="R919e46293424431d"/>
-    <p:sldId xmlns:r="http://schemas.openxmlformats.org/officeDocument/2006/relationships" id="272" r:id="R5df3234f5b094b72"/>
-    <p:sldId xmlns:r="http://schemas.openxmlformats.org/officeDocument/2006/relationships" id="273" r:id="R762f53c529a24ec5"/>
-    <p:sldId xmlns:r="http://schemas.openxmlformats.org/officeDocument/2006/relationships" id="274" r:id="R3abf175a2d874c22"/>
+    <p:sldId xmlns:r="http://schemas.openxmlformats.org/officeDocument/2006/relationships" id="256" r:id="R4aed686e02a64cec"/>
+    <p:sldId xmlns:r="http://schemas.openxmlformats.org/officeDocument/2006/relationships" id="257" r:id="R6a5dba39e24e40c9"/>
+    <p:sldId xmlns:r="http://schemas.openxmlformats.org/officeDocument/2006/relationships" id="258" r:id="R16540fe461924443"/>
+    <p:sldId xmlns:r="http://schemas.openxmlformats.org/officeDocument/2006/relationships" id="259" r:id="R8e008e8dbbd74049"/>
+    <p:sldId xmlns:r="http://schemas.openxmlformats.org/officeDocument/2006/relationships" id="260" r:id="R97ba6333c2e14948"/>
+    <p:sldId xmlns:r="http://schemas.openxmlformats.org/officeDocument/2006/relationships" id="261" r:id="R392eb04573dd4a52"/>
+    <p:sldId xmlns:r="http://schemas.openxmlformats.org/officeDocument/2006/relationships" id="262" r:id="R17663e56dba64499"/>
+    <p:sldId xmlns:r="http://schemas.openxmlformats.org/officeDocument/2006/relationships" id="263" r:id="Rdae263feb66444c5"/>
+    <p:sldId xmlns:r="http://schemas.openxmlformats.org/officeDocument/2006/relationships" id="264" r:id="Rd6f8c695ecf74e3a"/>
+    <p:sldId xmlns:r="http://schemas.openxmlformats.org/officeDocument/2006/relationships" id="265" r:id="R759925afa8514a5a"/>
+    <p:sldId xmlns:r="http://schemas.openxmlformats.org/officeDocument/2006/relationships" id="266" r:id="R40feac7fafb64ddc"/>
+    <p:sldId xmlns:r="http://schemas.openxmlformats.org/officeDocument/2006/relationships" id="267" r:id="Rcb10ec79711340b1"/>
+    <p:sldId xmlns:r="http://schemas.openxmlformats.org/officeDocument/2006/relationships" id="268" r:id="Rea1a363292574ec5"/>
+    <p:sldId xmlns:r="http://schemas.openxmlformats.org/officeDocument/2006/relationships" id="269" r:id="R62a0e587a7b64b33"/>
+    <p:sldId xmlns:r="http://schemas.openxmlformats.org/officeDocument/2006/relationships" id="270" r:id="R59d96efb2e5f40be"/>
+    <p:sldId xmlns:r="http://schemas.openxmlformats.org/officeDocument/2006/relationships" id="271" r:id="R5454280c42764ccf"/>
+    <p:sldId xmlns:r="http://schemas.openxmlformats.org/officeDocument/2006/relationships" id="272" r:id="R164ca2953bc84fd1"/>
+    <p:sldId xmlns:r="http://schemas.openxmlformats.org/officeDocument/2006/relationships" id="273" r:id="R89c999abb88c4451"/>
+    <p:sldId xmlns:r="http://schemas.openxmlformats.org/officeDocument/2006/relationships" id="274" r:id="R87e298fa94374800"/>
   </p:sldIdLst>
   <p:sldSz cx="12192000" cy="6858000"/>
   <p:notesSz cx="6858000" cy="9144000"/>
@@ -473,13 +473,13 @@
           </a:p>
           <a:p xmlns:a="http://schemas.openxmlformats.org/drawingml/2006/main">
             <a:r>
-              <a:t>- GOAI 参赛模板：D:/code/GOAI/比赛资料/GOAI参赛作品提交模板.pptx</a:t>
+              <a:t>- GOAI 参赛模板：GOAI 官方参赛模板</a:t>
             </a:r>
             <a:endParaRPr/>
           </a:p>
           <a:p xmlns:a="http://schemas.openxmlformats.org/drawingml/2006/main">
             <a:r>
-              <a:t>- 项目 README：SalesAgentTeams/README.md</a:t>
+              <a:t>- 项目 README：README.md</a:t>
             </a:r>
             <a:endParaRPr/>
           </a:p>
@@ -799,19 +799,25 @@
           </a:p>
           <a:p xmlns:a="http://schemas.openxmlformats.org/drawingml/2006/main">
             <a:r>
-              <a:t>- mcp_servers/evaluation_insights.py</a:t>
+              <a:t>- README.md</a:t>
             </a:r>
             <a:endParaRPr/>
           </a:p>
           <a:p xmlns:a="http://schemas.openxmlformats.org/drawingml/2006/main">
             <a:r>
-              <a:t>- sales_agent_teams/evaluation_service.py</a:t>
+              <a:t>- scripts/check_competition_readiness.py</a:t>
             </a:r>
             <a:endParaRPr/>
           </a:p>
           <a:p xmlns:a="http://schemas.openxmlformats.org/drawingml/2006/main">
             <a:r>
-              <a:t>- evaluation/core/scoring.py</a:t>
+              <a:t>- tests/（79 项零 API 验证）</a:t>
+            </a:r>
+            <a:endParaRPr/>
+          </a:p>
+          <a:p xmlns:a="http://schemas.openxmlformats.org/drawingml/2006/main">
+            <a:r>
+              <a:t>- submission/preliminary/运行证据清单.md（2026-08-12 受控真实 API 试运行）</a:t>
             </a:r>
             <a:endParaRPr/>
           </a:p>
@@ -1125,19 +1131,13 @@
           </a:p>
           <a:p xmlns:a="http://schemas.openxmlformats.org/drawingml/2006/main">
             <a:r>
-              <a:t>- pytest 运行结果</a:t>
+              <a:t>- submission/preliminary/历史评测与验证报告.md</a:t>
             </a:r>
             <a:endParaRPr/>
           </a:p>
           <a:p xmlns:a="http://schemas.openxmlformats.org/drawingml/2006/main">
             <a:r>
-              <a:t>- scripts/check_open_source.py</a:t>
-            </a:r>
-            <a:endParaRPr/>
-          </a:p>
-          <a:p xmlns:a="http://schemas.openxmlformats.org/drawingml/2006/main">
-            <a:r>
-              <a:t>- deployment/agentteams/sales-agent-teams.yaml</a:t>
+              <a:t>- 既有授权去标识化离线盲评汇总结论；本次未重跑</a:t>
             </a:r>
             <a:endParaRPr/>
           </a:p>
@@ -2045,7 +2045,7 @@
   </p:cSld>
   <p:clrMap bg1="lt1" tx1="dk1" bg2="lt2" tx2="dk2" accent1="accent1" accent2="accent2" accent3="accent3" accent4="accent4" accent5="accent5" accent6="accent6" hlink="hlink" folHlink="folHlink"/>
   <p:sldLayoutIdLst>
-    <p:sldLayoutId xmlns:r="http://schemas.openxmlformats.org/officeDocument/2006/relationships" id="2147483649" r:id="R5506d44120664cb9"/>
+    <p:sldLayoutId xmlns:r="http://schemas.openxmlformats.org/officeDocument/2006/relationships" id="2147483649" r:id="R5e01f28082cf45ef"/>
   </p:sldLayoutIdLst>
   <p:hf sldNum="0" hdr="0" ftr="0" dt="0"/>
   <p:txStyles>
@@ -2328,7 +2328,7 @@
   </p:cSld>
   <p:clrMap bg1="lt1" tx1="dk1" bg2="lt2" tx2="dk2" accent1="accent1" accent2="accent2" accent3="accent3" accent4="accent4" accent5="accent5" accent6="accent6" hlink="hlink" folHlink="folHlink"/>
   <p:sldLayoutIdLst>
-    <p:sldLayoutId xmlns:r="http://schemas.openxmlformats.org/officeDocument/2006/relationships" id="2147483651" r:id="R0e5fe17712eb4040"/>
+    <p:sldLayoutId xmlns:r="http://schemas.openxmlformats.org/officeDocument/2006/relationships" id="2147483651" r:id="R04fd7649ebf1453c"/>
   </p:sldLayoutIdLst>
   <p:hf sldNum="0" hdr="0" ftr="0" dt="0"/>
   <p:txStyles>
@@ -3301,7 +3301,7 @@
                 <a:ea typeface="微软雅黑"/>
                 <a:cs typeface="微软雅黑"/>
               </a:rPr>
-              <a:t>企业销售多智能体协同系统</a:t>
+              <a:t>办公技能培训多智能体销售系统</a:t>
             </a:r>
             <a:endParaRPr sz="4600"/>
           </a:p>
@@ -3395,7 +3395,7 @@
                 <a:ea typeface="微软雅黑"/>
                 <a:cs typeface="微软雅黑"/>
               </a:rPr>
-              <a:t>Agent Infra 初赛 · 六 Worker + Skill + MCP</a:t>
+              <a:t>Agent Infra 初赛 · 6 Worker · 10 Skill · 2 MCP</a:t>
             </a:r>
             <a:endParaRPr sz="1500" b="1" kern="0" spc="200">
               <a:solidFill>
@@ -3477,7 +3477,7 @@
                 <a:ea typeface="微软雅黑"/>
                 <a:cs typeface="微软雅黑"/>
               </a:rPr>
-              <a:t>4</a:t>
+              <a:t>10</a:t>
             </a:r>
             <a:endParaRPr sz="1000"/>
           </a:p>
@@ -3569,7 +3569,7 @@
                 <a:ea typeface="微软雅黑"/>
                 <a:cs typeface="微软雅黑"/>
               </a:rPr>
-              <a:t>Skill 工程体系</a:t>
+              <a:t>10 Skill 工程体系</a:t>
             </a:r>
             <a:endParaRPr sz="2900"/>
           </a:p>
@@ -3696,7 +3696,7 @@
                 <a:ea typeface="微软雅黑"/>
                 <a:cs typeface="微软雅黑"/>
               </a:rPr>
-              <a:t>SKILL.md 是每个 Worker 的必选运行契约</a:t>
+              <a:t>每个 Worker 必须绑定可复用 Skill</a:t>
             </a:r>
             <a:endParaRPr sz="1250"/>
           </a:p>
@@ -3892,7 +3892,7 @@
                 <a:ea typeface="微软雅黑"/>
                 <a:cs typeface="微软雅黑"/>
               </a:rPr>
-              <a:t>Skill 工程体系</a:t>
+              <a:t>10 Skill 工程体系</a:t>
             </a:r>
             <a:endParaRPr sz="2900"/>
           </a:p>
@@ -4009,7 +4009,7 @@
                 <a:ea typeface="微软雅黑"/>
                 <a:cs typeface="微软雅黑"/>
               </a:rPr>
-              <a:t>六个业务 Skill + 公共 evidence-handoff。每个 Skill 明确版本、输入输出、触发条件、依赖、权限、失败处理、验证和复用边界。</a:t>
+              <a:t>六业务 + Team Leader + Evidence + 2 Evaluation = 10 Skill；目的、输入输出、触发、工具、失败、安全、复用、流程与验证齐全。</a:t>
             </a:r>
             <a:endParaRPr>
               <a:latin typeface="微软雅黑"/>
@@ -4028,10 +4028,10 @@
           <p:nvPr/>
         </p:nvPicPr>
         <p:blipFill>
-          <a:blip xmlns:r="http://schemas.openxmlformats.org/officeDocument/2006/relationships" xmlns:a="http://schemas.openxmlformats.org/drawingml/2006/main" r:embed="R35f922957472468b">
+          <a:blip xmlns:r="http://schemas.openxmlformats.org/officeDocument/2006/relationships" xmlns:a="http://schemas.openxmlformats.org/drawingml/2006/main" r:embed="R29f0db40a79349f5">
             <a:extLst>
               <a:ext uri="{96DAC541-7B7A-43D3-8B79-37D633B846F1}">
-                <asvg:svgBlip xmlns:asvg="http://schemas.microsoft.com/office/drawing/2016/SVG/main" r:embed="R52f01ea417fb4268"/>
+                <asvg:svgBlip xmlns:asvg="http://schemas.microsoft.com/office/drawing/2016/SVG/main" r:embed="R8e4d8fd098f74c61"/>
               </a:ext>
             </a:extLst>
           </a:blip>
@@ -4118,7 +4118,7 @@
                 <a:ea typeface="微软雅黑"/>
                 <a:cs typeface="微软雅黑"/>
               </a:rPr>
-              <a:t>4</a:t>
+              <a:t>12</a:t>
             </a:r>
             <a:endParaRPr sz="1000"/>
           </a:p>
@@ -4210,7 +4210,7 @@
                 <a:ea typeface="微软雅黑"/>
                 <a:cs typeface="微软雅黑"/>
               </a:rPr>
-              <a:t>工程落地、运行验证与安全可审计</a:t>
+              <a:t>运行验证与安全审计</a:t>
             </a:r>
             <a:endParaRPr sz="2900"/>
           </a:p>
@@ -4533,7 +4533,7 @@
                 <a:ea typeface="微软雅黑"/>
                 <a:cs typeface="微软雅黑"/>
               </a:rPr>
-              <a:t>工程落地、运行验证与安全可审计</a:t>
+              <a:t>运行验证与安全审计</a:t>
             </a:r>
             <a:endParaRPr sz="2900"/>
           </a:p>
@@ -4575,7 +4575,7 @@
                 <a:ea typeface="微软雅黑"/>
                 <a:cs typeface="微软雅黑"/>
               </a:rPr>
-              <a:t>本地 Python 模式已验证；评估 MCP 输出 CSV、报告和 3D HTML；正式分数仅来自授权数据与人工盲评。</a:t>
+              <a:t>默认确定性模型完成 79 项测试；受控真实 API 试运行 6 / 6 Agent 单次成功，共 13,944 token；比赛项目未连接原会计数据库。</a:t>
             </a:r>
             <a:endParaRPr>
               <a:latin typeface="微软雅黑"/>
@@ -4594,10 +4594,10 @@
           <p:nvPr/>
         </p:nvPicPr>
         <p:blipFill>
-          <a:blip xmlns:r="http://schemas.openxmlformats.org/officeDocument/2006/relationships" xmlns:a="http://schemas.openxmlformats.org/drawingml/2006/main" r:embed="R23dacd1510614044">
+          <a:blip xmlns:r="http://schemas.openxmlformats.org/officeDocument/2006/relationships" xmlns:a="http://schemas.openxmlformats.org/drawingml/2006/main" r:embed="R4c59feac3b134c8f">
             <a:extLst>
               <a:ext uri="{96DAC541-7B7A-43D3-8B79-37D633B846F1}">
-                <asvg:svgBlip xmlns:asvg="http://schemas.microsoft.com/office/drawing/2016/SVG/main" r:embed="R5d5edb4f38a34d59"/>
+                <asvg:svgBlip xmlns:asvg="http://schemas.microsoft.com/office/drawing/2016/SVG/main" r:embed="R839c4bf616904046"/>
               </a:ext>
             </a:extLst>
           </a:blip>
@@ -4624,10 +4624,10 @@
           <p:nvPr/>
         </p:nvPicPr>
         <p:blipFill>
-          <a:blip xmlns:r="http://schemas.openxmlformats.org/officeDocument/2006/relationships" xmlns:a="http://schemas.openxmlformats.org/drawingml/2006/main" r:embed="R6b6d2fb2482746e5">
+          <a:blip xmlns:r="http://schemas.openxmlformats.org/officeDocument/2006/relationships" xmlns:a="http://schemas.openxmlformats.org/drawingml/2006/main" r:embed="Rae24984b9ec94963">
             <a:extLst>
               <a:ext uri="{96DAC541-7B7A-43D3-8B79-37D633B846F1}">
-                <asvg:svgBlip xmlns:asvg="http://schemas.microsoft.com/office/drawing/2016/SVG/main" r:embed="R7424960df0dd4ada"/>
+                <asvg:svgBlip xmlns:asvg="http://schemas.microsoft.com/office/drawing/2016/SVG/main" r:embed="R6fa57995abf64f1d"/>
               </a:ext>
             </a:extLst>
           </a:blip>
@@ -4654,10 +4654,10 @@
           <p:nvPr/>
         </p:nvPicPr>
         <p:blipFill>
-          <a:blip xmlns:r="http://schemas.openxmlformats.org/officeDocument/2006/relationships" xmlns:a="http://schemas.openxmlformats.org/drawingml/2006/main" r:embed="Rde454f0d6f68469e">
+          <a:blip xmlns:r="http://schemas.openxmlformats.org/officeDocument/2006/relationships" xmlns:a="http://schemas.openxmlformats.org/drawingml/2006/main" r:embed="Re4970b7addff4745">
             <a:extLst>
               <a:ext uri="{96DAC541-7B7A-43D3-8B79-37D633B846F1}">
-                <asvg:svgBlip xmlns:asvg="http://schemas.microsoft.com/office/drawing/2016/SVG/main" r:embed="R7880d3bcf8504fc2"/>
+                <asvg:svgBlip xmlns:asvg="http://schemas.microsoft.com/office/drawing/2016/SVG/main" r:embed="R61c6c5d9da524c93"/>
               </a:ext>
             </a:extLst>
           </a:blip>
@@ -4684,10 +4684,10 @@
           <p:nvPr/>
         </p:nvPicPr>
         <p:blipFill>
-          <a:blip xmlns:r="http://schemas.openxmlformats.org/officeDocument/2006/relationships" xmlns:a="http://schemas.openxmlformats.org/drawingml/2006/main" r:embed="R12d00425a12940e6">
+          <a:blip xmlns:r="http://schemas.openxmlformats.org/officeDocument/2006/relationships" xmlns:a="http://schemas.openxmlformats.org/drawingml/2006/main" r:embed="Rd254799568fd479b">
             <a:extLst>
               <a:ext uri="{96DAC541-7B7A-43D3-8B79-37D633B846F1}">
-                <asvg:svgBlip xmlns:asvg="http://schemas.microsoft.com/office/drawing/2016/SVG/main" r:embed="R4503f9f875524467"/>
+                <asvg:svgBlip xmlns:asvg="http://schemas.microsoft.com/office/drawing/2016/SVG/main" r:embed="Re7be80e0ada34b78"/>
               </a:ext>
             </a:extLst>
           </a:blip>
@@ -4714,10 +4714,10 @@
           <p:nvPr/>
         </p:nvPicPr>
         <p:blipFill>
-          <a:blip xmlns:r="http://schemas.openxmlformats.org/officeDocument/2006/relationships" xmlns:a="http://schemas.openxmlformats.org/drawingml/2006/main" r:embed="R21c6e241431d47d6">
+          <a:blip xmlns:r="http://schemas.openxmlformats.org/officeDocument/2006/relationships" xmlns:a="http://schemas.openxmlformats.org/drawingml/2006/main" r:embed="Rf825893d6b4b4a14">
             <a:extLst>
               <a:ext uri="{96DAC541-7B7A-43D3-8B79-37D633B846F1}">
-                <asvg:svgBlip xmlns:asvg="http://schemas.microsoft.com/office/drawing/2016/SVG/main" r:embed="R6a4555fef7e8403f"/>
+                <asvg:svgBlip xmlns:asvg="http://schemas.microsoft.com/office/drawing/2016/SVG/main" r:embed="R4932c1927ad84797"/>
               </a:ext>
             </a:extLst>
           </a:blip>
@@ -4802,7 +4802,7 @@
                 <a:ea typeface="微软雅黑"/>
                 <a:cs typeface="微软雅黑"/>
               </a:rPr>
-              <a:t>4</a:t>
+              <a:t>14</a:t>
             </a:r>
             <a:endParaRPr sz="1000"/>
           </a:p>
@@ -4894,7 +4894,7 @@
                 <a:ea typeface="微软雅黑"/>
                 <a:cs typeface="微软雅黑"/>
               </a:rPr>
-              <a:t>开放 / 开源计划</a:t>
+              <a:t>开源复现与成本控制</a:t>
             </a:r>
             <a:endParaRPr sz="2900"/>
           </a:p>
@@ -5021,7 +5021,7 @@
                 <a:ea typeface="微软雅黑"/>
                 <a:cs typeface="微软雅黑"/>
               </a:rPr>
-              <a:t>代码、Skill、MCP 契约和比赛材料一体化开源</a:t>
+              <a:t>代码、Skill、MCP、数据与材料一体化开源</a:t>
             </a:r>
             <a:endParaRPr sz="1250"/>
           </a:p>
@@ -5217,7 +5217,7 @@
                 <a:ea typeface="微软雅黑"/>
                 <a:cs typeface="微软雅黑"/>
               </a:rPr>
-              <a:t>开放 / 开源计划</a:t>
+              <a:t>开源复现与成本控制</a:t>
             </a:r>
             <a:endParaRPr sz="2900"/>
           </a:p>
@@ -5259,7 +5259,7 @@
                 <a:ea typeface="微软雅黑"/>
                 <a:cs typeface="微软雅黑"/>
               </a:rPr>
-              <a:t>GitHub 开源，AGPL-3.0；提供本地演示、MCP HTTP、Docker Compose、AgentTeams 清单和复现命令。</a:t>
+              <a:t>AGPL-3.0；默认零 API、一个独立数据库容器、完整启动命令、AgentTeams 清单、MCP 与自动合规检查均在 GitHub。</a:t>
             </a:r>
             <a:endParaRPr>
               <a:latin typeface="微软雅黑"/>
@@ -5278,10 +5278,10 @@
           <p:nvPr/>
         </p:nvPicPr>
         <p:blipFill>
-          <a:blip xmlns:r="http://schemas.openxmlformats.org/officeDocument/2006/relationships" xmlns:a="http://schemas.openxmlformats.org/drawingml/2006/main" r:embed="R3180ce9584c84cfd">
+          <a:blip xmlns:r="http://schemas.openxmlformats.org/officeDocument/2006/relationships" xmlns:a="http://schemas.openxmlformats.org/drawingml/2006/main" r:embed="Re1f9adea351448ae">
             <a:extLst>
               <a:ext uri="{96DAC541-7B7A-43D3-8B79-37D633B846F1}">
-                <asvg:svgBlip xmlns:asvg="http://schemas.microsoft.com/office/drawing/2016/SVG/main" r:embed="Rf43896b779b44024"/>
+                <asvg:svgBlip xmlns:asvg="http://schemas.microsoft.com/office/drawing/2016/SVG/main" r:embed="R530794d7cdfb4ef6"/>
               </a:ext>
             </a:extLst>
           </a:blip>
@@ -5366,7 +5366,7 @@
                 <a:ea typeface="微软雅黑"/>
                 <a:cs typeface="微软雅黑"/>
               </a:rPr>
-              <a:t>4</a:t>
+              <a:t>16</a:t>
             </a:r>
             <a:endParaRPr sz="1000"/>
           </a:p>
@@ -5412,7 +5412,7 @@
                 <a:ea typeface="微软雅黑"/>
                 <a:cs typeface="微软雅黑"/>
               </a:rPr>
-              <a:t>第七章 · 对应「当前进展」与整体可行性</a:t>
+              <a:t>第七章</a:t>
             </a:r>
             <a:endParaRPr sz="1200"/>
           </a:p>
@@ -5458,7 +5458,7 @@
                 <a:ea typeface="微软雅黑"/>
                 <a:cs typeface="微软雅黑"/>
               </a:rPr>
-              <a:t>落地计划与进展</a:t>
+              <a:t>历史评测与当前进展</a:t>
             </a:r>
             <a:endParaRPr sz="2900"/>
           </a:p>
@@ -5533,7 +5533,7 @@
                 <a:ea typeface="微软雅黑"/>
                 <a:cs typeface="微软雅黑"/>
               </a:rPr>
-              <a:t>第七章 · 对应「当前进展」与整体可行性</a:t>
+              <a:t>第七章</a:t>
             </a:r>
             <a:endParaRPr sz="1200"/>
           </a:p>
@@ -5579,7 +5579,7 @@
                 <a:ea typeface="微软雅黑"/>
                 <a:cs typeface="微软雅黑"/>
               </a:rPr>
-              <a:t>落地计划与进展</a:t>
+              <a:t>历史评测与当前进展</a:t>
             </a:r>
             <a:endParaRPr sz="2900"/>
           </a:p>
@@ -5625,7 +5625,7 @@
                 <a:ea typeface="微软雅黑"/>
                 <a:cs typeface="微软雅黑"/>
               </a:rPr>
-              <a:t>10</a:t>
+              <a:t>17</a:t>
             </a:r>
             <a:endParaRPr sz="1000"/>
           </a:p>
@@ -5662,7 +5662,8 @@
           <a:lstStyle xmlns:a="http://schemas.openxmlformats.org/drawingml/2006/main"/>
           <a:p xmlns:a="http://schemas.openxmlformats.org/drawingml/2006/main">
             <a:r>
-              <a:t>已完成：六 Worker 适配、Skill、MCP、评估热力图和公开材料。下一步：Docker/AgentTeams 环境冒烟、录制完整 Demo、补充授权盲评。</a:t>
+              <a:t>历史盲评：144 回合，系统 80.00 vs 真人 64.44；合规 100%，推进 79.17%。
+单评审、离线单轮；本次未重跑，不证明转化提升。</a:t>
             </a:r>
             <a:endParaRPr>
               <a:latin typeface="微软雅黑"/>
@@ -5681,10 +5682,10 @@
           <p:nvPr/>
         </p:nvPicPr>
         <p:blipFill>
-          <a:blip xmlns:r="http://schemas.openxmlformats.org/officeDocument/2006/relationships" xmlns:a="http://schemas.openxmlformats.org/drawingml/2006/main" r:embed="R66b1a258eb3b4abe">
+          <a:blip xmlns:r="http://schemas.openxmlformats.org/officeDocument/2006/relationships" xmlns:a="http://schemas.openxmlformats.org/drawingml/2006/main" r:embed="Rf1437132dcbd4942">
             <a:extLst>
               <a:ext uri="{96DAC541-7B7A-43D3-8B79-37D633B846F1}">
-                <asvg:svgBlip xmlns:asvg="http://schemas.microsoft.com/office/drawing/2016/SVG/main" r:embed="Rfa7c5affaae7433b"/>
+                <asvg:svgBlip xmlns:asvg="http://schemas.microsoft.com/office/drawing/2016/SVG/main" r:embed="R0fd125ed353b4348"/>
               </a:ext>
             </a:extLst>
           </a:blip>
@@ -5711,10 +5712,10 @@
           <p:nvPr/>
         </p:nvPicPr>
         <p:blipFill>
-          <a:blip xmlns:r="http://schemas.openxmlformats.org/officeDocument/2006/relationships" xmlns:a="http://schemas.openxmlformats.org/drawingml/2006/main" r:embed="Ra595cb393c4043fa">
+          <a:blip xmlns:r="http://schemas.openxmlformats.org/officeDocument/2006/relationships" xmlns:a="http://schemas.openxmlformats.org/drawingml/2006/main" r:embed="R8e875f59b2484bc1">
             <a:extLst>
               <a:ext uri="{96DAC541-7B7A-43D3-8B79-37D633B846F1}">
-                <asvg:svgBlip xmlns:asvg="http://schemas.microsoft.com/office/drawing/2016/SVG/main" r:embed="Rda6d62df960f4edf"/>
+                <asvg:svgBlip xmlns:asvg="http://schemas.microsoft.com/office/drawing/2016/SVG/main" r:embed="R8adcfc85a29a4bd6"/>
               </a:ext>
             </a:extLst>
           </a:blip>
@@ -5741,10 +5742,10 @@
           <p:nvPr/>
         </p:nvPicPr>
         <p:blipFill>
-          <a:blip xmlns:r="http://schemas.openxmlformats.org/officeDocument/2006/relationships" xmlns:a="http://schemas.openxmlformats.org/drawingml/2006/main" r:embed="R47d3f9d1bd3f4347">
+          <a:blip xmlns:r="http://schemas.openxmlformats.org/officeDocument/2006/relationships" xmlns:a="http://schemas.openxmlformats.org/drawingml/2006/main" r:embed="Rd1f5d5935a2a4a69">
             <a:extLst>
               <a:ext uri="{96DAC541-7B7A-43D3-8B79-37D633B846F1}">
-                <asvg:svgBlip xmlns:asvg="http://schemas.microsoft.com/office/drawing/2016/SVG/main" r:embed="Rd85660fa8cde4d73"/>
+                <asvg:svgBlip xmlns:asvg="http://schemas.microsoft.com/office/drawing/2016/SVG/main" r:embed="R9483f476bf704602"/>
               </a:ext>
             </a:extLst>
           </a:blip>
@@ -5829,7 +5830,7 @@
                 <a:ea typeface="微软雅黑"/>
                 <a:cs typeface="微软雅黑"/>
               </a:rPr>
-              <a:t>4</a:t>
+              <a:t>18</a:t>
             </a:r>
             <a:endParaRPr sz="1000"/>
           </a:p>
@@ -5875,7 +5876,7 @@
                 <a:ea typeface="微软雅黑"/>
                 <a:cs typeface="微软雅黑"/>
               </a:rPr>
-              <a:t>第八章 · </a:t>
+              <a:t>第八章</a:t>
             </a:r>
             <a:endParaRPr sz="1200"/>
           </a:p>
@@ -5921,7 +5922,7 @@
                 <a:ea typeface="微软雅黑"/>
                 <a:cs typeface="微软雅黑"/>
               </a:rPr>
-              <a:t>团队介绍</a:t>
+              <a:t>团队与提交结论</a:t>
             </a:r>
             <a:endParaRPr sz="2900" b="1">
               <a:solidFill>
@@ -6042,7 +6043,7 @@
                 <a:ea typeface="微软雅黑"/>
                 <a:cs typeface="微软雅黑"/>
               </a:rPr>
-              <a:t>团队介绍</a:t>
+              <a:t>团队与提交结论</a:t>
             </a:r>
             <a:endParaRPr sz="2900" b="1">
               <a:solidFill>
@@ -6093,172 +6094,25 @@
               <a:buSzTx/>
               <a:buFontTx/>
               <a:buNone/>
+              <a:defRPr sz="1800">
+                <a:solidFill>
+                  <a:schemeClr val="tx1"/>
+                </a:solidFill>
+                <a:latin typeface="微软雅黑"/>
+                <a:ea typeface="微软雅黑"/>
+                <a:cs typeface="微软雅黑"/>
+              </a:defRPr>
             </a:pPr>
             <a:r>
-              <a:rPr>
+              <a:rPr sz="1800">
+                <a:solidFill>
+                  <a:schemeClr val="tx1"/>
+                </a:solidFill>
                 <a:latin typeface="微软雅黑"/>
                 <a:ea typeface="微软雅黑"/>
                 <a:cs typeface="微软雅黑"/>
               </a:rPr>
-              <a:t>参赛者：troywjz｜个人开发者</a:t>
-            </a:r>
-            <a:endParaRPr>
-              <a:latin typeface="微软雅黑"/>
-              <a:ea typeface="微软雅黑"/>
-              <a:cs typeface="微软雅黑"/>
-            </a:endParaRPr>
-          </a:p>
-          <a:p xmlns:a="http://schemas.openxmlformats.org/drawingml/2006/main">
-            <a:pPr algn="l">
-              <a:lnSpc>
-                <a:spcPct val="150000"/>
-              </a:lnSpc>
-              <a:buClrTx/>
-              <a:buSzTx/>
-              <a:buFontTx/>
-              <a:buNone/>
-            </a:pPr>
-            <a:r>
-              <a:t/>
-            </a:r>
-            <a:endParaRPr>
-              <a:latin typeface="微软雅黑"/>
-              <a:ea typeface="微软雅黑"/>
-              <a:cs typeface="微软雅黑"/>
-            </a:endParaRPr>
-          </a:p>
-          <a:p xmlns:a="http://schemas.openxmlformats.org/drawingml/2006/main">
-            <a:pPr algn="l">
-              <a:lnSpc>
-                <a:spcPct val="150000"/>
-              </a:lnSpc>
-              <a:buClrTx/>
-              <a:buSzTx/>
-              <a:buFontTx/>
-              <a:buNone/>
-            </a:pPr>
-            <a:r>
-              <a:rPr>
-                <a:latin typeface="微软雅黑"/>
-                <a:ea typeface="微软雅黑"/>
-                <a:cs typeface="微软雅黑"/>
-              </a:rPr>
-              <a:t>角色：项目负责人、AI 产品设计、全栈开发</a:t>
-            </a:r>
-            <a:endParaRPr>
-              <a:latin typeface="微软雅黑"/>
-              <a:ea typeface="微软雅黑"/>
-              <a:cs typeface="微软雅黑"/>
-            </a:endParaRPr>
-          </a:p>
-          <a:p xmlns:a="http://schemas.openxmlformats.org/drawingml/2006/main">
-            <a:pPr marL="285750" indent="-285750" algn="l">
-              <a:lnSpc>
-                <a:spcPct val="150000"/>
-              </a:lnSpc>
-              <a:buClrTx/>
-              <a:buSzTx/>
-              <a:buFont typeface="Arial"/>
-              <a:buChar char="•"/>
-            </a:pPr>
-            <a:r>
-              <a:rPr>
-                <a:latin typeface="微软雅黑"/>
-                <a:ea typeface="微软雅黑"/>
-                <a:cs typeface="微软雅黑"/>
-              </a:rPr>
-              <a:t/>
-            </a:r>
-            <a:endParaRPr>
-              <a:latin typeface="微软雅黑"/>
-              <a:ea typeface="微软雅黑"/>
-              <a:cs typeface="微软雅黑"/>
-            </a:endParaRPr>
-          </a:p>
-          <a:p xmlns:a="http://schemas.openxmlformats.org/drawingml/2006/main">
-            <a:pPr marL="285750" indent="-285750" algn="l">
-              <a:lnSpc>
-                <a:spcPct val="150000"/>
-              </a:lnSpc>
-              <a:buClrTx/>
-              <a:buSzTx/>
-              <a:buFont typeface="Arial"/>
-              <a:buChar char="•"/>
-            </a:pPr>
-            <a:r>
-              <a:rPr>
-                <a:latin typeface="微软雅黑"/>
-                <a:ea typeface="微软雅黑"/>
-                <a:cs typeface="微软雅黑"/>
-              </a:rPr>
-              <a:t>分工：需求拆解、销售 Agent 设计、LangGraph 适配、AgentTeams Worker、Skill、MCP、评估与开源交付</a:t>
-            </a:r>
-            <a:endParaRPr>
-              <a:latin typeface="微软雅黑"/>
-              <a:ea typeface="微软雅黑"/>
-              <a:cs typeface="微软雅黑"/>
-            </a:endParaRPr>
-          </a:p>
-          <a:p xmlns:a="http://schemas.openxmlformats.org/drawingml/2006/main">
-            <a:pPr indent="0" algn="l">
-              <a:lnSpc>
-                <a:spcPct val="150000"/>
-              </a:lnSpc>
-              <a:buClrTx/>
-              <a:buSzTx/>
-              <a:buFont typeface="Arial"/>
-              <a:buNone/>
-            </a:pPr>
-            <a:r>
-              <a:t/>
-            </a:r>
-            <a:endParaRPr>
-              <a:latin typeface="微软雅黑"/>
-              <a:ea typeface="微软雅黑"/>
-              <a:cs typeface="微软雅黑"/>
-            </a:endParaRPr>
-          </a:p>
-          <a:p xmlns:a="http://schemas.openxmlformats.org/drawingml/2006/main">
-            <a:pPr algn="l">
-              <a:lnSpc>
-                <a:spcPct val="150000"/>
-              </a:lnSpc>
-              <a:buClrTx/>
-              <a:buSzTx/>
-              <a:buFontTx/>
-              <a:buNone/>
-            </a:pPr>
-            <a:r>
-              <a:rPr>
-                <a:latin typeface="微软雅黑"/>
-                <a:ea typeface="微软雅黑"/>
-                <a:cs typeface="微软雅黑"/>
-              </a:rPr>
-              <a:t>作品：SalesAgentTeams</a:t>
-            </a:r>
-            <a:endParaRPr>
-              <a:latin typeface="微软雅黑"/>
-              <a:ea typeface="微软雅黑"/>
-              <a:cs typeface="微软雅黑"/>
-            </a:endParaRPr>
-          </a:p>
-          <a:p xmlns:a="http://schemas.openxmlformats.org/drawingml/2006/main">
-            <a:pPr marL="285750" indent="-285750" algn="l">
-              <a:lnSpc>
-                <a:spcPct val="150000"/>
-              </a:lnSpc>
-              <a:buClrTx/>
-              <a:buSzTx/>
-              <a:buFont typeface="Arial"/>
-              <a:buChar char="•"/>
-            </a:pPr>
-            <a:r>
-              <a:rPr>
-                <a:latin typeface="微软雅黑"/>
-                <a:ea typeface="微软雅黑"/>
-                <a:cs typeface="微软雅黑"/>
-              </a:rPr>
-              <a:t>GitHub：https://github.com/troywjz/SalesAgentTeams</a:t>
+              <a:t>参赛者：troywjz｜个人开发者　｜　角色：项目负责人 · AI 产品设计 · 全栈开发　｜　负责：需求拆解、六 Agent / Worker、LangGraph、Skill、MCP、评测与开源交付　｜　作品：SalesAgentTeams　｜　GitHub：https://github.com/troywjz/SalesAgentTeams　｜　提交结论：可运行 · 可审计 · 默认零 API · 数据隔离 · 可开源复现</a:t>
             </a:r>
             <a:endParaRPr>
               <a:latin typeface="微软雅黑"/>
@@ -6485,7 +6339,7 @@
                 <a:ea typeface="微软雅黑"/>
                 <a:cs typeface="微软雅黑"/>
               </a:rPr>
-              <a:t>项目名称</a:t>
+              <a:t>项目定位</a:t>
             </a:r>
             <a:endParaRPr sz="1500"/>
           </a:p>
@@ -6534,7 +6388,7 @@
                 <a:ea typeface="微软雅黑"/>
                 <a:cs typeface="微软雅黑"/>
               </a:rPr>
-              <a:t>≤ 20 字。一句话说清「为谁、解决什么」。</a:t>
+              <a:t>办公技能培训销售多智能体协同系统</a:t>
             </a:r>
             <a:endParaRPr sz="1100"/>
           </a:p>
@@ -6580,7 +6434,7 @@
                 <a:ea typeface="微软雅黑"/>
                 <a:cs typeface="微软雅黑"/>
               </a:rPr>
-              <a:t>SalesAgentTeams</a:t>
+              <a:t>Excel · Word · PPT · AI 办公</a:t>
             </a:r>
             <a:endParaRPr sz="1050"/>
           </a:p>
@@ -6731,7 +6585,7 @@
                 <a:ea typeface="微软雅黑"/>
                 <a:cs typeface="微软雅黑"/>
               </a:rPr>
-              <a:t>目标用户是谁、在什么场景、现实痛点是什么。</a:t>
+              <a:t>场景分散，课程事实与风险边界难同时判断</a:t>
             </a:r>
             <a:endParaRPr sz="1100"/>
           </a:p>
@@ -6777,7 +6631,7 @@
                 <a:ea typeface="微软雅黑"/>
                 <a:cs typeface="微软雅黑"/>
               </a:rPr>
-              <a:t>企业销售咨询中的多 Agent 协作与风险控制</a:t>
+              <a:t>个人学习 · 团队流程 · 数据安全 · 交易咨询</a:t>
             </a:r>
             <a:endParaRPr sz="1050"/>
           </a:p>
@@ -6928,7 +6782,7 @@
                 <a:ea typeface="微软雅黑"/>
                 <a:cs typeface="微软雅黑"/>
               </a:rPr>
-              <a:t>一句话讲清整体思路：用多 Agent + Skill 怎么解。</a:t>
+              <a:t>六 Worker 闭环，Safety 强审，MCP 受控调用</a:t>
             </a:r>
             <a:endParaRPr sz="1100"/>
           </a:p>
@@ -6974,7 +6828,7 @@
                 <a:ea typeface="微软雅黑"/>
                 <a:cs typeface="微软雅黑"/>
               </a:rPr>
-              <a:t>六 Worker + LangGraph + MCP</a:t>
+              <a:t>AgentTeams + LangGraph + Skill</a:t>
             </a:r>
             <a:endParaRPr sz="1050"/>
           </a:p>
@@ -7076,7 +6930,7 @@
                 <a:ea typeface="微软雅黑"/>
                 <a:cs typeface="微软雅黑"/>
               </a:rPr>
-              <a:t>创新点与差异化</a:t>
+              <a:t>创新与差异</a:t>
             </a:r>
             <a:endParaRPr sz="1500"/>
           </a:p>
@@ -7125,7 +6979,7 @@
                 <a:ea typeface="微软雅黑"/>
                 <a:cs typeface="微软雅黑"/>
               </a:rPr>
-              <a:t>对比现有做法，你独特/更优在哪。</a:t>
+              <a:t>Agent Identity + 统一证据 + 可转人工</a:t>
             </a:r>
             <a:endParaRPr sz="1100"/>
           </a:p>
@@ -7171,7 +7025,7 @@
                 <a:ea typeface="微软雅黑"/>
                 <a:cs typeface="微软雅黑"/>
               </a:rPr>
-              <a:t>六角色分工，统一状态与证据</a:t>
+              <a:t>协作可见，不把流程藏在单 Prompt</a:t>
             </a:r>
             <a:endParaRPr sz="1050"/>
           </a:p>
@@ -7273,7 +7127,7 @@
                 <a:ea typeface="微软雅黑"/>
                 <a:cs typeface="微软雅黑"/>
               </a:rPr>
-              <a:t>开放 / 复用价值</a:t>
+              <a:t>复用与开放</a:t>
             </a:r>
             <a:endParaRPr sz="1500"/>
           </a:p>
@@ -7322,7 +7176,7 @@
                 <a:ea typeface="微软雅黑"/>
                 <a:cs typeface="微软雅黑"/>
               </a:rPr>
-              <a:t>可复用成果、能迁移到哪些场景。</a:t>
+              <a:t>替换知识快照即可迁移业务场景</a:t>
             </a:r>
             <a:endParaRPr sz="1100"/>
           </a:p>
@@ -7368,7 +7222,7 @@
                 <a:ea typeface="微软雅黑"/>
                 <a:cs typeface="微软雅黑"/>
               </a:rPr>
-              <a:t>可迁移到客服、售前、客户成功</a:t>
+              <a:t>10 Skill + 2 MCP · AGPL-3.0</a:t>
             </a:r>
             <a:endParaRPr sz="1050"/>
           </a:p>
@@ -7519,7 +7373,7 @@
                 <a:ea typeface="微软雅黑"/>
                 <a:cs typeface="微软雅黑"/>
               </a:rPr>
-              <a:t>做到了什么程度、有无可运行成果。</a:t>
+              <a:t>Web、MCP、AgentTeams、隔离数据库均可运行</a:t>
             </a:r>
             <a:endParaRPr sz="1100"/>
           </a:p>
@@ -7565,7 +7419,7 @@
                 <a:ea typeface="微软雅黑"/>
                 <a:cs typeface="微软雅黑"/>
               </a:rPr>
-              <a:t>本地链路、MCP 与 Worker 包已可运行</a:t>
+              <a:t>默认零 API · GitHub 可复现</a:t>
             </a:r>
             <a:endParaRPr sz="1050"/>
           </a:p>
@@ -7611,7 +7465,7 @@
                 <a:ea typeface="微软雅黑"/>
                 <a:cs typeface="微软雅黑"/>
               </a:rPr>
-              <a:t>3</a:t>
+              <a:t>2</a:t>
             </a:r>
             <a:endParaRPr sz="1000"/>
           </a:p>
@@ -7893,7 +7747,7 @@
                 <a:ea typeface="微软雅黑"/>
                 <a:cs typeface="微软雅黑"/>
               </a:rPr>
-              <a:t>场景与价值</a:t>
+              <a:t>办公技能场景与价值</a:t>
             </a:r>
             <a:endParaRPr sz="1250">
               <a:solidFill>
@@ -8043,7 +7897,7 @@
                 <a:ea typeface="微软雅黑"/>
                 <a:cs typeface="微软雅黑"/>
               </a:rPr>
-              <a:t>工程落地、运行验证与安全可审计</a:t>
+              <a:t>运行验证与安全审计</a:t>
             </a:r>
             <a:endParaRPr sz="1250">
               <a:solidFill>
@@ -8196,7 +8050,7 @@
                 <a:ea typeface="微软雅黑"/>
                 <a:cs typeface="微软雅黑"/>
               </a:rPr>
-              <a:t>方案总览</a:t>
+              <a:t>分层方案与数据隔离</a:t>
             </a:r>
             <a:endParaRPr sz="1250">
               <a:solidFill>
@@ -8349,7 +8203,7 @@
                 <a:ea typeface="微软雅黑"/>
                 <a:cs typeface="微软雅黑"/>
               </a:rPr>
-              <a:t>开放 / 开源计划</a:t>
+              <a:t>开源复现与成本控制</a:t>
             </a:r>
             <a:endParaRPr sz="1250">
               <a:solidFill>
@@ -8513,7 +8367,7 @@
                 <a:ea typeface="微软雅黑"/>
                 <a:cs typeface="微软雅黑"/>
               </a:rPr>
-              <a:t>多 Agent 协同设计</a:t>
+              <a:t>六 Worker 自主闭环</a:t>
             </a:r>
             <a:endParaRPr sz="1250">
               <a:solidFill>
@@ -8663,7 +8517,7 @@
                 <a:ea typeface="微软雅黑"/>
                 <a:cs typeface="微软雅黑"/>
               </a:rPr>
-              <a:t>落地计划与进展</a:t>
+              <a:t>历史评测与当前进展</a:t>
             </a:r>
             <a:endParaRPr sz="1250">
               <a:solidFill>
@@ -8816,7 +8670,7 @@
                 <a:ea typeface="微软雅黑"/>
                 <a:cs typeface="微软雅黑"/>
               </a:rPr>
-              <a:t>Skills 工具体系</a:t>
+              <a:t>10 Skill 工程体系</a:t>
             </a:r>
             <a:endParaRPr sz="1250">
               <a:solidFill>
@@ -8969,7 +8823,7 @@
                 <a:ea typeface="微软雅黑"/>
                 <a:cs typeface="微软雅黑"/>
               </a:rPr>
-              <a:t>运行演示与证据</a:t>
+              <a:t>团队与提交结论</a:t>
             </a:r>
             <a:endParaRPr sz="1250">
               <a:solidFill>
@@ -9097,7 +8951,7 @@
                 <a:ea typeface="微软雅黑"/>
                 <a:cs typeface="微软雅黑"/>
               </a:rPr>
-              <a:t>场景与价值</a:t>
+              <a:t>办公技能场景与价值</a:t>
             </a:r>
             <a:endParaRPr sz="2900"/>
           </a:p>
@@ -9459,7 +9313,7 @@
                 <a:ea typeface="微软雅黑"/>
                 <a:cs typeface="微软雅黑"/>
               </a:rPr>
-              <a:t>场景与价值</a:t>
+              <a:t>办公技能场景与价值</a:t>
             </a:r>
             <a:endParaRPr sz="2900"/>
           </a:p>
@@ -9501,7 +9355,7 @@
                 <a:ea typeface="微软雅黑"/>
                 <a:cs typeface="微软雅黑"/>
               </a:rPr>
-              <a:t>销售咨询需要同时判断意图、阶段、知识、回复策略和风险。系统把职责拆开，让每一步都有输入、输出和证据。</a:t>
+              <a:t>办公技能咨询同时涉及真实工作任务、客户基础、课程与价格、隐私和交易边界。六 Worker 让每一步都可验证。</a:t>
             </a:r>
             <a:endParaRPr>
               <a:latin typeface="微软雅黑"/>
@@ -9520,10 +9374,10 @@
           <p:nvPr/>
         </p:nvPicPr>
         <p:blipFill>
-          <a:blip xmlns:r="http://schemas.openxmlformats.org/officeDocument/2006/relationships" xmlns:a="http://schemas.openxmlformats.org/drawingml/2006/main" r:embed="R9b2da65c7ca1400a">
+          <a:blip xmlns:r="http://schemas.openxmlformats.org/officeDocument/2006/relationships" xmlns:a="http://schemas.openxmlformats.org/drawingml/2006/main" r:embed="R46a9eadc71434960">
             <a:extLst>
               <a:ext uri="{96DAC541-7B7A-43D3-8B79-37D633B846F1}">
-                <asvg:svgBlip xmlns:asvg="http://schemas.microsoft.com/office/drawing/2016/SVG/main" r:embed="R1cc8e470acaf42fa"/>
+                <asvg:svgBlip xmlns:asvg="http://schemas.microsoft.com/office/drawing/2016/SVG/main" r:embed="R79fcb8159e854bdc"/>
               </a:ext>
             </a:extLst>
           </a:blip>
@@ -9575,7 +9429,7 @@
               <a:buNone/>
             </a:pPr>
             <a:r>
-              <a:t>客户咨询 → 结构化判断 → 可推进回复 → 安全审核</a:t>
+              <a:t>工作场景 → 证据检索 → 推进草稿 → 安全审核 / 人工接管</a:t>
             </a:r>
             <a:endParaRPr/>
           </a:p>
@@ -9590,10 +9444,10 @@
           <p:nvPr/>
         </p:nvPicPr>
         <p:blipFill>
-          <a:blip xmlns:r="http://schemas.openxmlformats.org/officeDocument/2006/relationships" xmlns:a="http://schemas.openxmlformats.org/drawingml/2006/main" r:embed="R3d53637a30f1402d">
+          <a:blip xmlns:r="http://schemas.openxmlformats.org/officeDocument/2006/relationships" xmlns:a="http://schemas.openxmlformats.org/drawingml/2006/main" r:embed="Rcd3c0f2dcb5c4f5a">
             <a:extLst>
               <a:ext uri="{96DAC541-7B7A-43D3-8B79-37D633B846F1}">
-                <asvg:svgBlip xmlns:asvg="http://schemas.microsoft.com/office/drawing/2016/SVG/main" r:embed="R7dea38424980400e"/>
+                <asvg:svgBlip xmlns:asvg="http://schemas.microsoft.com/office/drawing/2016/SVG/main" r:embed="R5a8aac668ef84c9c"/>
               </a:ext>
             </a:extLst>
           </a:blip>
@@ -9748,7 +9602,7 @@
                 <a:ea typeface="微软雅黑"/>
                 <a:cs typeface="微软雅黑"/>
               </a:rPr>
-              <a:t>方案总览</a:t>
+              <a:t>分层方案与数据隔离</a:t>
             </a:r>
             <a:endParaRPr sz="2900" b="1">
               <a:solidFill>
@@ -9801,7 +9655,7 @@
                 <a:ea typeface="微软雅黑"/>
                 <a:cs typeface="微软雅黑"/>
               </a:rPr>
-              <a:t>4</a:t>
+              <a:t>6</a:t>
             </a:r>
             <a:endParaRPr sz="1000"/>
           </a:p>
@@ -9922,7 +9776,7 @@
                 <a:ea typeface="微软雅黑"/>
                 <a:cs typeface="微软雅黑"/>
               </a:rPr>
-              <a:t>方案总览</a:t>
+              <a:t>分层方案与数据隔离</a:t>
             </a:r>
             <a:endParaRPr sz="2900"/>
           </a:p>
@@ -9968,7 +9822,7 @@
                 <a:ea typeface="微软雅黑"/>
                 <a:cs typeface="微软雅黑"/>
               </a:rPr>
-              <a:t>5</a:t>
+              <a:t>7</a:t>
             </a:r>
             <a:endParaRPr sz="1000"/>
           </a:p>
@@ -10010,7 +9864,7 @@
                 <a:ea typeface="微软雅黑"/>
                 <a:cs typeface="微软雅黑"/>
               </a:rPr>
-              <a:t>保留 LangGraph 业务内核，通过适配层接入 AgentTeams；六个业务 Agent 一一对应六个 Worker。</a:t>
+              <a:t>LangGraph 保留业务内核，AgentTeams 负责外层协作；Web 18100 与数据库 15432 / sales_agent_demo 和原项目隔离。</a:t>
             </a:r>
             <a:endParaRPr>
               <a:latin typeface="微软雅黑"/>
@@ -10029,10 +9883,10 @@
           <p:nvPr/>
         </p:nvPicPr>
         <p:blipFill>
-          <a:blip xmlns:r="http://schemas.openxmlformats.org/officeDocument/2006/relationships" xmlns:a="http://schemas.openxmlformats.org/drawingml/2006/main" r:embed="Rec8afbaa00d04cf8">
+          <a:blip xmlns:r="http://schemas.openxmlformats.org/officeDocument/2006/relationships" xmlns:a="http://schemas.openxmlformats.org/drawingml/2006/main" r:embed="R846e8d48edef4a6e">
             <a:extLst>
               <a:ext uri="{96DAC541-7B7A-43D3-8B79-37D633B846F1}">
-                <asvg:svgBlip xmlns:asvg="http://schemas.microsoft.com/office/drawing/2016/SVG/main" r:embed="Rf8ca76ac933d438b"/>
+                <asvg:svgBlip xmlns:asvg="http://schemas.microsoft.com/office/drawing/2016/SVG/main" r:embed="R024df02000ee4a0e"/>
               </a:ext>
             </a:extLst>
           </a:blip>
@@ -10119,7 +9973,7 @@
                 <a:ea typeface="微软雅黑"/>
                 <a:cs typeface="微软雅黑"/>
               </a:rPr>
-              <a:t>4</a:t>
+              <a:t>8</a:t>
             </a:r>
             <a:endParaRPr sz="1000"/>
           </a:p>
@@ -10211,7 +10065,7 @@
                 <a:ea typeface="微软雅黑"/>
                 <a:cs typeface="微软雅黑"/>
               </a:rPr>
-              <a:t>多 Agent 协同设计</a:t>
+              <a:t>六 Worker 自主闭环</a:t>
             </a:r>
             <a:endParaRPr sz="2900"/>
           </a:p>
@@ -10534,7 +10388,7 @@
                 <a:ea typeface="微软雅黑"/>
                 <a:cs typeface="微软雅黑"/>
               </a:rPr>
-              <a:t>多 Agent 协同设计</a:t>
+              <a:t>六 Worker 自主闭环</a:t>
             </a:r>
             <a:endParaRPr sz="2900"/>
           </a:p>
@@ -10576,7 +10430,7 @@
                 <a:ea typeface="微软雅黑"/>
                 <a:cs typeface="微软雅黑"/>
               </a:rPr>
-              <a:t>Manager → Team Leader → Worker。上下文通过 task_id / turn_id / state 传递，高风险节点可暂停并转人工。</a:t>
+              <a:t>Manager → Team Leader → 六 Worker；task_id / turn_id / state / evidence_refs 贯穿分解、工具、审核和人工接管。</a:t>
             </a:r>
             <a:endParaRPr>
               <a:latin typeface="微软雅黑"/>
@@ -10595,10 +10449,10 @@
           <p:nvPr/>
         </p:nvPicPr>
         <p:blipFill>
-          <a:blip xmlns:r="http://schemas.openxmlformats.org/officeDocument/2006/relationships" xmlns:a="http://schemas.openxmlformats.org/drawingml/2006/main" r:embed="R23132e05226e4b80">
+          <a:blip xmlns:r="http://schemas.openxmlformats.org/officeDocument/2006/relationships" xmlns:a="http://schemas.openxmlformats.org/drawingml/2006/main" r:embed="R287866f4468b4525">
             <a:extLst>
               <a:ext uri="{96DAC541-7B7A-43D3-8B79-37D633B846F1}">
-                <asvg:svgBlip xmlns:asvg="http://schemas.microsoft.com/office/drawing/2016/SVG/main" r:embed="R7cfc52e185514746"/>
+                <asvg:svgBlip xmlns:asvg="http://schemas.microsoft.com/office/drawing/2016/SVG/main" r:embed="Rf35643dd9f5148e2"/>
               </a:ext>
             </a:extLst>
           </a:blip>
@@ -10625,10 +10479,10 @@
           <p:nvPr/>
         </p:nvPicPr>
         <p:blipFill>
-          <a:blip xmlns:r="http://schemas.openxmlformats.org/officeDocument/2006/relationships" xmlns:a="http://schemas.openxmlformats.org/drawingml/2006/main" r:embed="Ra0831cd0ac444fba">
+          <a:blip xmlns:r="http://schemas.openxmlformats.org/officeDocument/2006/relationships" xmlns:a="http://schemas.openxmlformats.org/drawingml/2006/main" r:embed="R4e75570cc9ff4ba6">
             <a:extLst>
               <a:ext uri="{96DAC541-7B7A-43D3-8B79-37D633B846F1}">
-                <asvg:svgBlip xmlns:asvg="http://schemas.microsoft.com/office/drawing/2016/SVG/main" r:embed="R2e403038d0754a8d"/>
+                <asvg:svgBlip xmlns:asvg="http://schemas.microsoft.com/office/drawing/2016/SVG/main" r:embed="R12e658825e9f4e40"/>
               </a:ext>
             </a:extLst>
           </a:blip>
